--- a/modulo-03/03.04 - Definindo CDS Views Básicas (Interface Views)/03.04_Definindo_CDS_views_básicas.pptx
+++ b/modulo-03/03.04 - Definindo CDS Views Básicas (Interface Views)/03.04_Definindo_CDS_views_básicas.pptx
@@ -1728,7 +1728,7 @@
                   <a:srgbClr val="8FA3C7"/>
                 </a:solidFill>
               </a:rPr>
-              <a:t>ABAP Moderno · Módulo 02 — Modelagem de Dados com Dicionário e CDS  ·  Aula 4 de 7 — CDS views básicas</a:t>
+              <a:t>ABAP Moderno · Módulo 03 — Modelagem de Dados com Dicionário e CDS  ·  Aula 4 de 7 — CDS views básicas</a:t>
             </a:r>
             <a:endParaRPr lang="en-US" sz="900" dirty="0"/>
           </a:p>
@@ -1874,7 +1874,7 @@
                   <a:srgbClr val="556B82"/>
                 </a:solidFill>
               </a:rPr>
-              <a:t>ABAP Moderno · Módulo 02 — Modelagem de Dados com Dicionário e CDS  ·  Aula 4 de 7 — CDS views básicas</a:t>
+              <a:t>ABAP Moderno · Módulo 03 — Modelagem de Dados com Dicionário e CDS  ·  Aula 4 de 7 — CDS views básicas</a:t>
             </a:r>
             <a:endParaRPr lang="en-US" sz="900" dirty="0"/>
           </a:p>
@@ -2305,7 +2305,7 @@
                   <a:srgbClr val="89D1FF"/>
                 </a:solidFill>
               </a:rPr>
-              <a:t>MÓDULO 02 · AULA 04 DE 07</a:t>
+              <a:t>MÓDULO 03 · AULA 04 DE 07</a:t>
             </a:r>
             <a:endParaRPr lang="en-US" sz="1400" dirty="0"/>
           </a:p>
@@ -2647,7 +2647,7 @@
                   <a:srgbClr val="8FA3C7"/>
                 </a:solidFill>
               </a:rPr>
-              <a:t>ABAP Moderno · Módulo 02 — Modelagem de Dados com Dicionário e CDS · Design System SAP Horizon</a:t>
+              <a:t>ABAP Moderno · Módulo 03 — Modelagem de Dados com Dicionário e CDS · Design System SAP Horizon</a:t>
             </a:r>
             <a:endParaRPr lang="en-US" sz="1100" dirty="0"/>
           </a:p>
@@ -2754,7 +2754,7 @@
                   <a:srgbClr val="89D1FF"/>
                 </a:solidFill>
               </a:rPr>
-              <a:t>AULA 02.04 · SEÇÃO 3</a:t>
+              <a:t>AULA 03.04 · SEÇÃO 3</a:t>
             </a:r>
             <a:endParaRPr lang="en-US" sz="1300" dirty="0"/>
           </a:p>
@@ -3191,7 +3191,7 @@
                   <a:srgbClr val="0064D9"/>
                 </a:solidFill>
               </a:rPr>
-              <a:t>CAMADAS · VIEW C_</a:t>
+              <a:t>CAMADAS · VIEW SOBRE VIEW</a:t>
             </a:r>
             <a:endParaRPr lang="en-US" sz="1100" dirty="0"/>
           </a:p>
@@ -3229,7 +3229,7 @@
                   <a:srgbClr val="1D2D3E"/>
                 </a:solidFill>
               </a:rPr>
-              <a:t>Uma view de consumo sobre a view de modelo</a:t>
+              <a:t>Uma view de análise sobre a view de modelo</a:t>
             </a:r>
             <a:endParaRPr lang="en-US" sz="2800" dirty="0"/>
           </a:p>
@@ -3293,7 +3293,7 @@
         <p:spPr>
           <a:xfrm>
             <a:off x="640080" y="1700784"/>
-            <a:ext cx="2697480" cy="292608"/>
+            <a:ext cx="2619756" cy="292608"/>
           </a:xfrm>
           <a:prstGeom prst="rect">
             <a:avLst/>
@@ -3313,7 +3313,7 @@
         <p:spPr>
           <a:xfrm>
             <a:off x="640080" y="1700784"/>
-            <a:ext cx="2697480" cy="27432"/>
+            <a:ext cx="2619756" cy="27432"/>
           </a:xfrm>
           <a:prstGeom prst="rect">
             <a:avLst/>
@@ -3333,7 +3333,7 @@
         <p:spPr>
           <a:xfrm>
             <a:off x="731520" y="1719072"/>
-            <a:ext cx="2514600" cy="274320"/>
+            <a:ext cx="2436876" cy="274320"/>
           </a:xfrm>
           <a:prstGeom prst="rect">
             <a:avLst/>
@@ -3354,7 +3354,7 @@
                   <a:srgbClr val="FFFFFF"/>
                 </a:solidFill>
               </a:rPr>
-              <a:t>zs4d430_c_employee.ddls.asddls</a:t>
+              <a:t>zi_pc_pedido_cube.ddls.asddls</a:t>
             </a:r>
             <a:endParaRPr lang="en-US" sz="950" dirty="0"/>
           </a:p>
@@ -3390,7 +3390,7 @@
                   <a:srgbClr val="9DA5B4"/>
                 </a:solidFill>
               </a:rPr>
-              <a:t>ZS4D430_## › Core Data Services › Data Definitions</a:t>
+              <a:t>ZAVBS_PC_PEDIDOS › ZI_PC_PEDIDO_CUBE (simplificada)</a:t>
             </a:r>
             <a:endParaRPr lang="en-US" sz="850" dirty="0"/>
           </a:p>
@@ -3800,7 +3800,7 @@
                 <a:ea typeface="Courier New" pitchFamily="34" charset="-122"/>
                 <a:cs typeface="Courier New" pitchFamily="34" charset="-120"/>
               </a:rPr>
-              <a:t>'Employee (consumption)'</a:t>
+              <a:t>'Pedidos - cubo analítico'</a:t>
             </a:r>
             <a:endParaRPr lang="en-US" sz="1050" dirty="0"/>
           </a:p>
@@ -3939,7 +3939,7 @@
                 <a:ea typeface="Courier New" pitchFamily="34" charset="-122"/>
                 <a:cs typeface="Courier New" pitchFamily="34" charset="-120"/>
               </a:rPr>
-              <a:t>ZS4D430_C_Employee</a:t>
+              <a:t>ZI_PC_PEDIDO_CUBE</a:t>
             </a:r>
             <a:endParaRPr lang="en-US" sz="1050" dirty="0"/>
           </a:p>
@@ -4036,7 +4036,7 @@
                 <a:ea typeface="Courier New" pitchFamily="34" charset="-122"/>
                 <a:cs typeface="Courier New" pitchFamily="34" charset="-120"/>
               </a:rPr>
-              <a:t>ZS4D430_R_Employee</a:t>
+              <a:t>ZR_PC_PEDIDO</a:t>
             </a:r>
             <a:endParaRPr lang="en-US" sz="1050" dirty="0"/>
           </a:p>
@@ -4109,7 +4109,7 @@
                 <a:ea typeface="Courier New" pitchFamily="34" charset="-122"/>
                 <a:cs typeface="Courier New" pitchFamily="34" charset="-120"/>
               </a:rPr>
-              <a:t>EmployeeId</a:t>
+              <a:t>PedidoUUID</a:t>
             </a:r>
             <a:r>
               <a:rPr lang="en-US" sz="1050" dirty="0">
@@ -4151,7 +4151,7 @@
                 <a:ea typeface="Courier New" pitchFamily="34" charset="-122"/>
                 <a:cs typeface="Courier New" pitchFamily="34" charset="-120"/>
               </a:rPr>
-              <a:t>FirstName</a:t>
+              <a:t>NumeroPedido</a:t>
             </a:r>
             <a:r>
               <a:rPr lang="en-US" sz="1050" dirty="0">
@@ -4193,7 +4193,7 @@
                 <a:ea typeface="Courier New" pitchFamily="34" charset="-122"/>
                 <a:cs typeface="Courier New" pitchFamily="34" charset="-120"/>
               </a:rPr>
-              <a:t>LastName</a:t>
+              <a:t>StatusPedido</a:t>
             </a:r>
             <a:r>
               <a:rPr lang="en-US" sz="1050" dirty="0">
@@ -4229,24 +4229,13 @@
             <a:r>
               <a:rPr lang="en-US" sz="1050" dirty="0">
                 <a:solidFill>
-                  <a:srgbClr val="4EC9B0"/>
-                </a:solidFill>
-                <a:latin typeface="Courier New" pitchFamily="34" charset="0"/>
-                <a:ea typeface="Courier New" pitchFamily="34" charset="-122"/>
-                <a:cs typeface="Courier New" pitchFamily="34" charset="-120"/>
-              </a:rPr>
-              <a:t>@Semantics.amount.currencyCode</a:t>
-            </a:r>
-            <a:r>
-              <a:rPr lang="en-US" sz="1050" dirty="0">
-                <a:solidFill>
                   <a:srgbClr val="CCCCCC"/>
                 </a:solidFill>
                 <a:latin typeface="Courier New" pitchFamily="34" charset="0"/>
                 <a:ea typeface="Courier New" pitchFamily="34" charset="-122"/>
                 <a:cs typeface="Courier New" pitchFamily="34" charset="-120"/>
               </a:rPr>
-              <a:t>:</a:t>
+              <a:t>Currency</a:t>
             </a:r>
             <a:r>
               <a:rPr lang="en-US" sz="1050" dirty="0">
@@ -4257,18 +4246,7 @@
                 <a:ea typeface="Courier New" pitchFamily="34" charset="-122"/>
                 <a:cs typeface="Courier New" pitchFamily="34" charset="-120"/>
               </a:rPr>
-              <a:t> </a:t>
-            </a:r>
-            <a:r>
-              <a:rPr lang="en-US" sz="1050" dirty="0">
-                <a:solidFill>
-                  <a:srgbClr val="CE9178"/>
-                </a:solidFill>
-                <a:latin typeface="Courier New" pitchFamily="34" charset="0"/>
-                <a:ea typeface="Courier New" pitchFamily="34" charset="-122"/>
-                <a:cs typeface="Courier New" pitchFamily="34" charset="-120"/>
-              </a:rPr>
-              <a:t>'CurrencyCode'</a:t>
+              <a:t>,</a:t>
             </a:r>
             <a:endParaRPr lang="en-US" sz="1050" dirty="0"/>
           </a:p>
@@ -4293,13 +4271,24 @@
             <a:r>
               <a:rPr lang="en-US" sz="1050" dirty="0">
                 <a:solidFill>
+                  <a:srgbClr val="4EC9B0"/>
+                </a:solidFill>
+                <a:latin typeface="Courier New" pitchFamily="34" charset="0"/>
+                <a:ea typeface="Courier New" pitchFamily="34" charset="-122"/>
+                <a:cs typeface="Courier New" pitchFamily="34" charset="-120"/>
+              </a:rPr>
+              <a:t>@Semantics.amount.currencyCode</a:t>
+            </a:r>
+            <a:r>
+              <a:rPr lang="en-US" sz="1050" dirty="0">
+                <a:solidFill>
                   <a:srgbClr val="CCCCCC"/>
                 </a:solidFill>
                 <a:latin typeface="Courier New" pitchFamily="34" charset="0"/>
                 <a:ea typeface="Courier New" pitchFamily="34" charset="-122"/>
                 <a:cs typeface="Courier New" pitchFamily="34" charset="-120"/>
               </a:rPr>
-              <a:t>AnnualSalary</a:t>
+              <a:t>:</a:t>
             </a:r>
             <a:r>
               <a:rPr lang="en-US" sz="1050" dirty="0">
@@ -4310,7 +4299,18 @@
                 <a:ea typeface="Courier New" pitchFamily="34" charset="-122"/>
                 <a:cs typeface="Courier New" pitchFamily="34" charset="-120"/>
               </a:rPr>
-              <a:t>,</a:t>
+              <a:t> </a:t>
+            </a:r>
+            <a:r>
+              <a:rPr lang="en-US" sz="1050" dirty="0">
+                <a:solidFill>
+                  <a:srgbClr val="CE9178"/>
+                </a:solidFill>
+                <a:latin typeface="Courier New" pitchFamily="34" charset="0"/>
+                <a:ea typeface="Courier New" pitchFamily="34" charset="-122"/>
+                <a:cs typeface="Courier New" pitchFamily="34" charset="-120"/>
+              </a:rPr>
+              <a:t>'Currency'</a:t>
             </a:r>
             <a:endParaRPr lang="en-US" sz="1050" dirty="0"/>
           </a:p>
@@ -4341,7 +4341,7 @@
                 <a:ea typeface="Courier New" pitchFamily="34" charset="-122"/>
                 <a:cs typeface="Courier New" pitchFamily="34" charset="-120"/>
               </a:rPr>
-              <a:t>CurrencyCode</a:t>
+              <a:t>ValorTotal</a:t>
             </a:r>
             <a:endParaRPr lang="en-US" sz="1050" dirty="0"/>
           </a:p>
@@ -4507,7 +4507,7 @@
                 <a:ea typeface="Courier New" pitchFamily="34" charset="-122"/>
                 <a:cs typeface="Courier New" pitchFamily="34" charset="-120"/>
               </a:rPr>
-              <a:t>from ZS4D430_R_Employee</a:t>
+              <a:t>from ZR_PC_PEDIDO</a:t>
             </a:r>
             <a:r>
               <a:rPr lang="en-US" sz="1050" dirty="0">
@@ -4515,7 +4515,7 @@
                   <a:srgbClr val="556B82"/>
                 </a:solidFill>
               </a:rPr>
-              <a:t>: a lógica da view de modelo é reutilizada.</a:t>
+              <a:t>: a lógica da view de modelo é reutilizada pelo app de análise.</a:t>
             </a:r>
             <a:endParaRPr lang="en-US" sz="1400" dirty="0"/>
           </a:p>
@@ -5476,7 +5476,7 @@
         </p:blipFill>
         <p:spPr>
           <a:xfrm>
-            <a:off x="850392" y="2661412"/>
+            <a:off x="8399069" y="2661412"/>
             <a:ext cx="256032" cy="256032"/>
           </a:xfrm>
           <a:prstGeom prst="rect">
@@ -5500,7 +5500,7 @@
         </p:blipFill>
         <p:spPr>
           <a:xfrm>
-            <a:off x="8399069" y="2661412"/>
+            <a:off x="850392" y="2661412"/>
             <a:ext cx="256032" cy="256032"/>
           </a:xfrm>
           <a:prstGeom prst="rect">
@@ -5524,8 +5524,8 @@
         </p:blipFill>
         <p:spPr>
           <a:xfrm>
-            <a:off x="4624730" y="2661412"/>
-            <a:ext cx="256032" cy="256032"/>
+            <a:off x="749808" y="5019548"/>
+            <a:ext cx="310896" cy="310896"/>
           </a:xfrm>
           <a:prstGeom prst="rect">
             <a:avLst/>
@@ -5548,8 +5548,8 @@
         </p:blipFill>
         <p:spPr>
           <a:xfrm>
-            <a:off x="749808" y="5019548"/>
-            <a:ext cx="310896" cy="310896"/>
+            <a:off x="4624730" y="2661412"/>
+            <a:ext cx="256032" cy="256032"/>
           </a:xfrm>
           <a:prstGeom prst="rect">
             <a:avLst/>
@@ -5692,7 +5692,7 @@
                   <a:srgbClr val="FFFFFF"/>
                 </a:solidFill>
               </a:rPr>
-              <a:t>O que aprendemos na aula 02.04</a:t>
+              <a:t>O que aprendemos na aula 03.04</a:t>
             </a:r>
             <a:endParaRPr lang="en-US" sz="3200" dirty="0"/>
           </a:p>
@@ -6259,7 +6259,7 @@
                   <a:srgbClr val="89D1FF"/>
                 </a:solidFill>
               </a:rPr>
-              <a:t>Próxima aula · 02.05  </a:t>
+              <a:t>Próxima aula · 03.05  </a:t>
             </a:r>
             <a:r>
               <a:rPr lang="en-US" sz="1500" dirty="0">
@@ -6536,7 +6536,7 @@
                   <a:srgbClr val="1D2D3E"/>
                 </a:solidFill>
               </a:rPr>
-              <a:t>Módulo 02 em 7 aulas: Dicionário e CDS</a:t>
+              <a:t>Módulo 03 em 7 aulas: Dicionário e CDS</a:t>
             </a:r>
             <a:endParaRPr lang="en-US" sz="2800" dirty="0"/>
           </a:p>
@@ -7794,7 +7794,7 @@
                   <a:srgbClr val="1D2D3E"/>
                 </a:solidFill>
               </a:rPr>
-              <a:t>desacoplamos o acesso aos dados da tabela de funcionários com uma view </a:t>
+              <a:t>desacoplamos o acesso à tabela de pedidos com a view </a:t>
             </a:r>
             <a:r>
               <a:rPr lang="en-US" sz="1200" dirty="0">
@@ -7805,7 +7805,7 @@
                 <a:ea typeface="Courier New" pitchFamily="34" charset="-122"/>
                 <a:cs typeface="Courier New" pitchFamily="34" charset="-120"/>
               </a:rPr>
-              <a:t>R_</a:t>
+              <a:t>ZR_PC_PEDIDO</a:t>
             </a:r>
             <a:r>
               <a:rPr lang="en-US" sz="1200" dirty="0">
@@ -7813,26 +7813,7 @@
                   <a:srgbClr val="1D2D3E"/>
                 </a:solidFill>
               </a:rPr>
-              <a:t> e criamos sobre ela uma view de consumo </a:t>
-            </a:r>
-            <a:r>
-              <a:rPr lang="en-US" sz="1200" dirty="0">
-                <a:solidFill>
-                  <a:srgbClr val="0064D9"/>
-                </a:solidFill>
-                <a:latin typeface="Courier New" pitchFamily="34" charset="0"/>
-                <a:ea typeface="Courier New" pitchFamily="34" charset="-122"/>
-                <a:cs typeface="Courier New" pitchFamily="34" charset="-120"/>
-              </a:rPr>
-              <a:t>C_</a:t>
-            </a:r>
-            <a:r>
-              <a:rPr lang="en-US" sz="1200" dirty="0">
-                <a:solidFill>
-                  <a:srgbClr val="1D2D3E"/>
-                </a:solidFill>
-              </a:rPr>
-              <a:t>.</a:t>
+              <a:t> e vemos como o projeto empilha sobre ela as views de análise.</a:t>
             </a:r>
             <a:endParaRPr lang="en-US" sz="1400" dirty="0"/>
           </a:p>
@@ -7854,7 +7835,7 @@
         </p:blipFill>
         <p:spPr>
           <a:xfrm>
-            <a:off x="5455768" y="1847088"/>
+            <a:off x="5455768" y="3858768"/>
             <a:ext cx="347472" cy="347472"/>
           </a:xfrm>
           <a:prstGeom prst="rect">
@@ -7902,7 +7883,7 @@
         </p:blipFill>
         <p:spPr>
           <a:xfrm>
-            <a:off x="8275091" y="1847088"/>
+            <a:off x="5455768" y="1847088"/>
             <a:ext cx="347472" cy="347472"/>
           </a:xfrm>
           <a:prstGeom prst="rect">
@@ -7950,7 +7931,7 @@
         </p:blipFill>
         <p:spPr>
           <a:xfrm>
-            <a:off x="2636444" y="3858768"/>
+            <a:off x="8275091" y="1847088"/>
             <a:ext cx="347472" cy="347472"/>
           </a:xfrm>
           <a:prstGeom prst="rect">
@@ -7974,7 +7955,7 @@
         </p:blipFill>
         <p:spPr>
           <a:xfrm>
-            <a:off x="5455768" y="3858768"/>
+            <a:off x="2636444" y="3858768"/>
             <a:ext cx="347472" cy="347472"/>
           </a:xfrm>
           <a:prstGeom prst="rect">
@@ -8803,7 +8784,7 @@
                   <a:srgbClr val="89D1FF"/>
                 </a:solidFill>
               </a:rPr>
-              <a:t>AULA 02.04 · SEÇÃO 1</a:t>
+              <a:t>AULA 03.04 · SEÇÃO 1</a:t>
             </a:r>
             <a:endParaRPr lang="en-US" sz="1300" dirty="0"/>
           </a:p>
@@ -8875,7 +8856,7 @@
                   <a:srgbClr val="D1EFFF"/>
                 </a:solidFill>
               </a:rPr>
-              <a:t>A view lê a tabela de funcionários, renomeia os campos em </a:t>
+              <a:t>A view lê a tabela de pedidos, renomeia os campos em </a:t>
             </a:r>
             <a:r>
               <a:rPr lang="en-US" sz="1600" i="1" dirty="0">
@@ -9262,7 +9243,7 @@
                   <a:srgbClr val="1D2D3E"/>
                 </a:solidFill>
               </a:rPr>
-              <a:t>Uma view entity sobre a tabela de funcionários</a:t>
+              <a:t>Uma view entity sobre a tabela de pedidos</a:t>
             </a:r>
             <a:endParaRPr lang="en-US" sz="2800" dirty="0"/>
           </a:p>
@@ -9326,7 +9307,7 @@
         <p:spPr>
           <a:xfrm>
             <a:off x="640080" y="1700784"/>
-            <a:ext cx="2697480" cy="292608"/>
+            <a:ext cx="2231136" cy="292608"/>
           </a:xfrm>
           <a:prstGeom prst="rect">
             <a:avLst/>
@@ -9346,7 +9327,7 @@
         <p:spPr>
           <a:xfrm>
             <a:off x="640080" y="1700784"/>
-            <a:ext cx="2697480" cy="27432"/>
+            <a:ext cx="2231136" cy="27432"/>
           </a:xfrm>
           <a:prstGeom prst="rect">
             <a:avLst/>
@@ -9366,7 +9347,7 @@
         <p:spPr>
           <a:xfrm>
             <a:off x="731520" y="1719072"/>
-            <a:ext cx="2514600" cy="274320"/>
+            <a:ext cx="2048256" cy="274320"/>
           </a:xfrm>
           <a:prstGeom prst="rect">
             <a:avLst/>
@@ -9387,7 +9368,7 @@
                   <a:srgbClr val="FFFFFF"/>
                 </a:solidFill>
               </a:rPr>
-              <a:t>zs4d430_r_employee.ddls.asddls</a:t>
+              <a:t>zr_pc_pedido.ddls.asddls</a:t>
             </a:r>
             <a:endParaRPr lang="en-US" sz="950" dirty="0"/>
           </a:p>
@@ -9423,7 +9404,7 @@
                   <a:srgbClr val="9DA5B4"/>
                 </a:solidFill>
               </a:rPr>
-              <a:t>ZS4D430_## › Core Data Services › Data Definitions</a:t>
+              <a:t>ZAVBS_PC_PEDIDOS › ZR_PC_PEDIDO (simplificada)</a:t>
             </a:r>
             <a:endParaRPr lang="en-US" sz="850" dirty="0"/>
           </a:p>
@@ -9833,7 +9814,7 @@
                 <a:ea typeface="Courier New" pitchFamily="34" charset="-122"/>
                 <a:cs typeface="Courier New" pitchFamily="34" charset="-120"/>
               </a:rPr>
-              <a:t>'Employee (data model)'</a:t>
+              <a:t>'Pedido de compra - BO root'</a:t>
             </a:r>
             <a:endParaRPr lang="en-US" sz="1050" dirty="0"/>
           </a:p>
@@ -9875,6 +9856,28 @@
                 <a:ea typeface="Courier New" pitchFamily="34" charset="-122"/>
                 <a:cs typeface="Courier New" pitchFamily="34" charset="-120"/>
               </a:rPr>
+              <a:t>root</a:t>
+            </a:r>
+            <a:r>
+              <a:rPr lang="en-US" sz="1050" dirty="0">
+                <a:solidFill>
+                  <a:srgbClr val="CCCCCC"/>
+                </a:solidFill>
+                <a:latin typeface="Courier New" pitchFamily="34" charset="0"/>
+                <a:ea typeface="Courier New" pitchFamily="34" charset="-122"/>
+                <a:cs typeface="Courier New" pitchFamily="34" charset="-120"/>
+              </a:rPr>
+              <a:t> </a:t>
+            </a:r>
+            <a:r>
+              <a:rPr lang="en-US" sz="1050" dirty="0">
+                <a:solidFill>
+                  <a:srgbClr val="569CD6"/>
+                </a:solidFill>
+                <a:latin typeface="Courier New" pitchFamily="34" charset="0"/>
+                <a:ea typeface="Courier New" pitchFamily="34" charset="-122"/>
+                <a:cs typeface="Courier New" pitchFamily="34" charset="-120"/>
+              </a:rPr>
               <a:t>view</a:t>
             </a:r>
             <a:r>
@@ -9919,7 +9922,7 @@
                 <a:ea typeface="Courier New" pitchFamily="34" charset="-122"/>
                 <a:cs typeface="Courier New" pitchFamily="34" charset="-120"/>
               </a:rPr>
-              <a:t>ZS4D430_R_Employee</a:t>
+              <a:t>ZR_PC_PEDIDO</a:t>
             </a:r>
             <a:endParaRPr lang="en-US" sz="1050" dirty="0"/>
           </a:p>
@@ -10016,7 +10019,7 @@
                 <a:ea typeface="Courier New" pitchFamily="34" charset="-122"/>
                 <a:cs typeface="Courier New" pitchFamily="34" charset="-120"/>
               </a:rPr>
-              <a:t>zs4d430_employ</a:t>
+              <a:t>zta_pc_pedido</a:t>
             </a:r>
             <a:endParaRPr lang="en-US" sz="1050" dirty="0"/>
           </a:p>
@@ -10089,7 +10092,7 @@
                 <a:ea typeface="Courier New" pitchFamily="34" charset="-122"/>
                 <a:cs typeface="Courier New" pitchFamily="34" charset="-120"/>
               </a:rPr>
-              <a:t>employee_id</a:t>
+              <a:t>pedido_uuid</a:t>
             </a:r>
             <a:r>
               <a:rPr lang="en-US" sz="1050" dirty="0">
@@ -10133,7 +10136,7 @@
                 <a:ea typeface="Courier New" pitchFamily="34" charset="-122"/>
                 <a:cs typeface="Courier New" pitchFamily="34" charset="-120"/>
               </a:rPr>
-              <a:t>EmployeeId</a:t>
+              <a:t>PedidoUUID</a:t>
             </a:r>
             <a:r>
               <a:rPr lang="en-US" sz="1050" dirty="0">
@@ -10175,7 +10178,7 @@
                 <a:ea typeface="Courier New" pitchFamily="34" charset="-122"/>
                 <a:cs typeface="Courier New" pitchFamily="34" charset="-120"/>
               </a:rPr>
-              <a:t>first_name</a:t>
+              <a:t>numero_pedido</a:t>
             </a:r>
             <a:r>
               <a:rPr lang="en-US" sz="1050" dirty="0">
@@ -10186,7 +10189,7 @@
                 <a:ea typeface="Courier New" pitchFamily="34" charset="-122"/>
                 <a:cs typeface="Courier New" pitchFamily="34" charset="-120"/>
               </a:rPr>
-              <a:t>    </a:t>
+              <a:t> </a:t>
             </a:r>
             <a:r>
               <a:rPr lang="en-US" sz="1050" dirty="0">
@@ -10219,7 +10222,7 @@
                 <a:ea typeface="Courier New" pitchFamily="34" charset="-122"/>
                 <a:cs typeface="Courier New" pitchFamily="34" charset="-120"/>
               </a:rPr>
-              <a:t>FirstName</a:t>
+              <a:t>NumeroPedido</a:t>
             </a:r>
             <a:r>
               <a:rPr lang="en-US" sz="1050" dirty="0">
@@ -10261,7 +10264,7 @@
                 <a:ea typeface="Courier New" pitchFamily="34" charset="-122"/>
                 <a:cs typeface="Courier New" pitchFamily="34" charset="-120"/>
               </a:rPr>
-              <a:t>last_name</a:t>
+              <a:t>cliente_uuid</a:t>
             </a:r>
             <a:r>
               <a:rPr lang="en-US" sz="1050" dirty="0">
@@ -10272,7 +10275,7 @@
                 <a:ea typeface="Courier New" pitchFamily="34" charset="-122"/>
                 <a:cs typeface="Courier New" pitchFamily="34" charset="-120"/>
               </a:rPr>
-              <a:t>     </a:t>
+              <a:t>  </a:t>
             </a:r>
             <a:r>
               <a:rPr lang="en-US" sz="1050" dirty="0">
@@ -10305,7 +10308,7 @@
                 <a:ea typeface="Courier New" pitchFamily="34" charset="-122"/>
                 <a:cs typeface="Courier New" pitchFamily="34" charset="-120"/>
               </a:rPr>
-              <a:t>LastName</a:t>
+              <a:t>ClienteUUID</a:t>
             </a:r>
             <a:r>
               <a:rPr lang="en-US" sz="1050" dirty="0">
@@ -10347,7 +10350,7 @@
                 <a:ea typeface="Courier New" pitchFamily="34" charset="-122"/>
                 <a:cs typeface="Courier New" pitchFamily="34" charset="-120"/>
               </a:rPr>
-              <a:t>department_id</a:t>
+              <a:t>status_pedido</a:t>
             </a:r>
             <a:r>
               <a:rPr lang="en-US" sz="1050" dirty="0">
@@ -10391,7 +10394,7 @@
                 <a:ea typeface="Courier New" pitchFamily="34" charset="-122"/>
                 <a:cs typeface="Courier New" pitchFamily="34" charset="-120"/>
               </a:rPr>
-              <a:t>DepartmentId</a:t>
+              <a:t>StatusPedido</a:t>
             </a:r>
             <a:r>
               <a:rPr lang="en-US" sz="1050" dirty="0">
@@ -10427,24 +10430,13 @@
             <a:r>
               <a:rPr lang="en-US" sz="1050" dirty="0">
                 <a:solidFill>
-                  <a:srgbClr val="4EC9B0"/>
-                </a:solidFill>
-                <a:latin typeface="Courier New" pitchFamily="34" charset="0"/>
-                <a:ea typeface="Courier New" pitchFamily="34" charset="-122"/>
-                <a:cs typeface="Courier New" pitchFamily="34" charset="-120"/>
-              </a:rPr>
-              <a:t>@Semantics.amount.currencyCode</a:t>
-            </a:r>
-            <a:r>
-              <a:rPr lang="en-US" sz="1050" dirty="0">
-                <a:solidFill>
                   <a:srgbClr val="CCCCCC"/>
                 </a:solidFill>
                 <a:latin typeface="Courier New" pitchFamily="34" charset="0"/>
                 <a:ea typeface="Courier New" pitchFamily="34" charset="-122"/>
                 <a:cs typeface="Courier New" pitchFamily="34" charset="-120"/>
               </a:rPr>
-              <a:t>:</a:t>
+              <a:t>currency</a:t>
             </a:r>
             <a:r>
               <a:rPr lang="en-US" sz="1050" dirty="0">
@@ -10455,18 +10447,51 @@
                 <a:ea typeface="Courier New" pitchFamily="34" charset="-122"/>
                 <a:cs typeface="Courier New" pitchFamily="34" charset="-120"/>
               </a:rPr>
+              <a:t>      </a:t>
+            </a:r>
+            <a:r>
+              <a:rPr lang="en-US" sz="1050" dirty="0">
+                <a:solidFill>
+                  <a:srgbClr val="569CD6"/>
+                </a:solidFill>
+                <a:latin typeface="Courier New" pitchFamily="34" charset="0"/>
+                <a:ea typeface="Courier New" pitchFamily="34" charset="-122"/>
+                <a:cs typeface="Courier New" pitchFamily="34" charset="-120"/>
+              </a:rPr>
+              <a:t>as</a:t>
+            </a:r>
+            <a:r>
+              <a:rPr lang="en-US" sz="1050" dirty="0">
+                <a:solidFill>
+                  <a:srgbClr val="CCCCCC"/>
+                </a:solidFill>
+                <a:latin typeface="Courier New" pitchFamily="34" charset="0"/>
+                <a:ea typeface="Courier New" pitchFamily="34" charset="-122"/>
+                <a:cs typeface="Courier New" pitchFamily="34" charset="-120"/>
+              </a:rPr>
               <a:t> </a:t>
             </a:r>
             <a:r>
               <a:rPr lang="en-US" sz="1050" dirty="0">
                 <a:solidFill>
-                  <a:srgbClr val="CE9178"/>
-                </a:solidFill>
-                <a:latin typeface="Courier New" pitchFamily="34" charset="0"/>
-                <a:ea typeface="Courier New" pitchFamily="34" charset="-122"/>
-                <a:cs typeface="Courier New" pitchFamily="34" charset="-120"/>
-              </a:rPr>
-              <a:t>'CurrencyCode'</a:t>
+                  <a:srgbClr val="CCCCCC"/>
+                </a:solidFill>
+                <a:latin typeface="Courier New" pitchFamily="34" charset="0"/>
+                <a:ea typeface="Courier New" pitchFamily="34" charset="-122"/>
+                <a:cs typeface="Courier New" pitchFamily="34" charset="-120"/>
+              </a:rPr>
+              <a:t>Currency</a:t>
+            </a:r>
+            <a:r>
+              <a:rPr lang="en-US" sz="1050" dirty="0">
+                <a:solidFill>
+                  <a:srgbClr val="CCCCCC"/>
+                </a:solidFill>
+                <a:latin typeface="Courier New" pitchFamily="34" charset="0"/>
+                <a:ea typeface="Courier New" pitchFamily="34" charset="-122"/>
+                <a:cs typeface="Courier New" pitchFamily="34" charset="-120"/>
+              </a:rPr>
+              <a:t>,</a:t>
             </a:r>
             <a:endParaRPr lang="en-US" sz="1050" dirty="0"/>
           </a:p>
@@ -10491,13 +10516,24 @@
             <a:r>
               <a:rPr lang="en-US" sz="1050" dirty="0">
                 <a:solidFill>
+                  <a:srgbClr val="4EC9B0"/>
+                </a:solidFill>
+                <a:latin typeface="Courier New" pitchFamily="34" charset="0"/>
+                <a:ea typeface="Courier New" pitchFamily="34" charset="-122"/>
+                <a:cs typeface="Courier New" pitchFamily="34" charset="-120"/>
+              </a:rPr>
+              <a:t>@Semantics.amount.currencyCode</a:t>
+            </a:r>
+            <a:r>
+              <a:rPr lang="en-US" sz="1050" dirty="0">
+                <a:solidFill>
                   <a:srgbClr val="CCCCCC"/>
                 </a:solidFill>
                 <a:latin typeface="Courier New" pitchFamily="34" charset="0"/>
                 <a:ea typeface="Courier New" pitchFamily="34" charset="-122"/>
                 <a:cs typeface="Courier New" pitchFamily="34" charset="-120"/>
               </a:rPr>
-              <a:t>annual_salary</a:t>
+              <a:t>:</a:t>
             </a:r>
             <a:r>
               <a:rPr lang="en-US" sz="1050" dirty="0">
@@ -10513,46 +10549,13 @@
             <a:r>
               <a:rPr lang="en-US" sz="1050" dirty="0">
                 <a:solidFill>
-                  <a:srgbClr val="569CD6"/>
-                </a:solidFill>
-                <a:latin typeface="Courier New" pitchFamily="34" charset="0"/>
-                <a:ea typeface="Courier New" pitchFamily="34" charset="-122"/>
-                <a:cs typeface="Courier New" pitchFamily="34" charset="-120"/>
-              </a:rPr>
-              <a:t>as</a:t>
-            </a:r>
-            <a:r>
-              <a:rPr lang="en-US" sz="1050" dirty="0">
-                <a:solidFill>
-                  <a:srgbClr val="CCCCCC"/>
-                </a:solidFill>
-                <a:latin typeface="Courier New" pitchFamily="34" charset="0"/>
-                <a:ea typeface="Courier New" pitchFamily="34" charset="-122"/>
-                <a:cs typeface="Courier New" pitchFamily="34" charset="-120"/>
-              </a:rPr>
-              <a:t> </a:t>
-            </a:r>
-            <a:r>
-              <a:rPr lang="en-US" sz="1050" dirty="0">
-                <a:solidFill>
-                  <a:srgbClr val="CCCCCC"/>
-                </a:solidFill>
-                <a:latin typeface="Courier New" pitchFamily="34" charset="0"/>
-                <a:ea typeface="Courier New" pitchFamily="34" charset="-122"/>
-                <a:cs typeface="Courier New" pitchFamily="34" charset="-120"/>
-              </a:rPr>
-              <a:t>AnnualSalary</a:t>
-            </a:r>
-            <a:r>
-              <a:rPr lang="en-US" sz="1050" dirty="0">
-                <a:solidFill>
-                  <a:srgbClr val="CCCCCC"/>
-                </a:solidFill>
-                <a:latin typeface="Courier New" pitchFamily="34" charset="0"/>
-                <a:ea typeface="Courier New" pitchFamily="34" charset="-122"/>
-                <a:cs typeface="Courier New" pitchFamily="34" charset="-120"/>
-              </a:rPr>
-              <a:t>,</a:t>
+                  <a:srgbClr val="CE9178"/>
+                </a:solidFill>
+                <a:latin typeface="Courier New" pitchFamily="34" charset="0"/>
+                <a:ea typeface="Courier New" pitchFamily="34" charset="-122"/>
+                <a:cs typeface="Courier New" pitchFamily="34" charset="-120"/>
+              </a:rPr>
+              <a:t>'Currency'</a:t>
             </a:r>
             <a:endParaRPr lang="en-US" sz="1050" dirty="0"/>
           </a:p>
@@ -10583,7 +10586,7 @@
                 <a:ea typeface="Courier New" pitchFamily="34" charset="-122"/>
                 <a:cs typeface="Courier New" pitchFamily="34" charset="-120"/>
               </a:rPr>
-              <a:t>currency_code</a:t>
+              <a:t>valor_total</a:t>
             </a:r>
             <a:r>
               <a:rPr lang="en-US" sz="1050" dirty="0">
@@ -10594,40 +10597,40 @@
                 <a:ea typeface="Courier New" pitchFamily="34" charset="-122"/>
                 <a:cs typeface="Courier New" pitchFamily="34" charset="-120"/>
               </a:rPr>
+              <a:t>   </a:t>
+            </a:r>
+            <a:r>
+              <a:rPr lang="en-US" sz="1050" dirty="0">
+                <a:solidFill>
+                  <a:srgbClr val="569CD6"/>
+                </a:solidFill>
+                <a:latin typeface="Courier New" pitchFamily="34" charset="0"/>
+                <a:ea typeface="Courier New" pitchFamily="34" charset="-122"/>
+                <a:cs typeface="Courier New" pitchFamily="34" charset="-120"/>
+              </a:rPr>
+              <a:t>as</a:t>
+            </a:r>
+            <a:r>
+              <a:rPr lang="en-US" sz="1050" dirty="0">
+                <a:solidFill>
+                  <a:srgbClr val="CCCCCC"/>
+                </a:solidFill>
+                <a:latin typeface="Courier New" pitchFamily="34" charset="0"/>
+                <a:ea typeface="Courier New" pitchFamily="34" charset="-122"/>
+                <a:cs typeface="Courier New" pitchFamily="34" charset="-120"/>
+              </a:rPr>
               <a:t> </a:t>
             </a:r>
             <a:r>
               <a:rPr lang="en-US" sz="1050" dirty="0">
                 <a:solidFill>
-                  <a:srgbClr val="569CD6"/>
-                </a:solidFill>
-                <a:latin typeface="Courier New" pitchFamily="34" charset="0"/>
-                <a:ea typeface="Courier New" pitchFamily="34" charset="-122"/>
-                <a:cs typeface="Courier New" pitchFamily="34" charset="-120"/>
-              </a:rPr>
-              <a:t>as</a:t>
-            </a:r>
-            <a:r>
-              <a:rPr lang="en-US" sz="1050" dirty="0">
-                <a:solidFill>
                   <a:srgbClr val="CCCCCC"/>
                 </a:solidFill>
                 <a:latin typeface="Courier New" pitchFamily="34" charset="0"/>
                 <a:ea typeface="Courier New" pitchFamily="34" charset="-122"/>
                 <a:cs typeface="Courier New" pitchFamily="34" charset="-120"/>
               </a:rPr>
-              <a:t> </a:t>
-            </a:r>
-            <a:r>
-              <a:rPr lang="en-US" sz="1050" dirty="0">
-                <a:solidFill>
-                  <a:srgbClr val="CCCCCC"/>
-                </a:solidFill>
-                <a:latin typeface="Courier New" pitchFamily="34" charset="0"/>
-                <a:ea typeface="Courier New" pitchFamily="34" charset="-122"/>
-                <a:cs typeface="Courier New" pitchFamily="34" charset="-120"/>
-              </a:rPr>
-              <a:t>CurrencyCode</a:t>
+              <a:t>ValorTotal</a:t>
             </a:r>
             <a:endParaRPr lang="en-US" sz="1050" dirty="0"/>
           </a:p>
@@ -11970,7 +11973,7 @@
         </p:blipFill>
         <p:spPr>
           <a:xfrm>
-            <a:off x="850392" y="2209800"/>
+            <a:off x="6511900" y="2209800"/>
             <a:ext cx="256032" cy="256032"/>
           </a:xfrm>
           <a:prstGeom prst="rect">
@@ -12018,7 +12021,7 @@
         </p:blipFill>
         <p:spPr>
           <a:xfrm>
-            <a:off x="6511900" y="2209800"/>
+            <a:off x="850392" y="2209800"/>
             <a:ext cx="256032" cy="256032"/>
           </a:xfrm>
           <a:prstGeom prst="rect">
@@ -12172,7 +12175,7 @@
                   <a:srgbClr val="89D1FF"/>
                 </a:solidFill>
               </a:rPr>
-              <a:t>AULA 02.04 · SEÇÃO 2</a:t>
+              <a:t>AULA 03.04 · SEÇÃO 2</a:t>
             </a:r>
             <a:endParaRPr lang="en-US" sz="1300" dirty="0"/>
           </a:p>
@@ -13044,7 +13047,7 @@
                             <a:srgbClr val="1D2D3E"/>
                           </a:solidFill>
                         </a:rPr>
-                        <a:t>Como a view pode ser estendida (aula 02.07)</a:t>
+                        <a:t>Como a view pode ser estendida (aula 03.07)</a:t>
                       </a:r>
                       <a:endParaRPr lang="en-US" sz="1200" dirty="0"/>
                     </a:p>
